--- a/MECH191_metallurgy/slideDecks/pptx/MECH191_Week6_Lecture.pptx
+++ b/MECH191_metallurgy/slideDecks/pptx/MECH191_Week6_Lecture.pptx
@@ -13256,7 +13256,7 @@
         </p:spPr>
         <p:txBody>
           <a:bodyPr wrap="none" lIns="0" rIns="0" tIns="0" bIns="0">
-            <a:spAutoFit/>
+            <a:noAutofit/>
           </a:bodyPr>
           <a:lstStyle/>
           <a:p>
@@ -13267,7 +13267,7 @@
                 </a:solidFill>
                 <a:latin typeface="Calibri"/>
               </a:rPr>
-              <a:t>Metallography Lab — Module 5</a:t>
+              <a:t>Alloy Research Portfolio — Module 5</a:t>
             </a:r>
           </a:p>
         </p:txBody>
@@ -13290,7 +13290,7 @@
         </p:spPr>
         <p:txBody>
           <a:bodyPr wrap="none" lIns="0" rIns="0" tIns="0" bIns="0">
-            <a:spAutoFit/>
+            <a:noAutofit/>
           </a:bodyPr>
           <a:lstStyle/>
           <a:p>
@@ -13301,7 +13301,7 @@
                 </a:solidFill>
                 <a:latin typeface="Calibri"/>
               </a:rPr>
-              <a:t>EXAMET-5-R-600-HD  ·  50–500×</a:t>
+              <a:t>No Microscope Required</a:t>
             </a:r>
           </a:p>
         </p:txBody>
@@ -13426,7 +13426,7 @@
         </p:spPr>
         <p:txBody>
           <a:bodyPr wrap="none" lIns="0" rIns="0" tIns="0" bIns="0">
-            <a:spAutoFit/>
+            <a:noAutofit/>
           </a:bodyPr>
           <a:lstStyle/>
           <a:p>
@@ -13437,7 +13437,7 @@
                 </a:solidFill>
                 <a:latin typeface="Calibri"/>
               </a:rPr>
-              <a:t>Observe twin density in brass vs. stainless steel. Look for fine Mg₂Si </a:t>
+              <a:t>Research 6061-T6 aluminum and 70/30 brass: composition, the T6 temper,</a:t>
             </a:r>
           </a:p>
         </p:txBody>
@@ -13460,7 +13460,7 @@
         </p:spPr>
         <p:txBody>
           <a:bodyPr wrap="none" lIns="0" rIns="0" tIns="0" bIns="0">
-            <a:spAutoFit/>
+            <a:noAutofit/>
           </a:bodyPr>
           <a:lstStyle/>
           <a:p>
@@ -13471,7 +13471,7 @@
                 </a:solidFill>
                 <a:latin typeface="Calibri"/>
               </a:rPr>
-              <a:t>precipitates in Al at 500×.</a:t>
+              <a:t>and each alloy's strengthening mechanism.</a:t>
             </a:r>
           </a:p>
         </p:txBody>
@@ -13528,7 +13528,7 @@
         </p:spPr>
         <p:txBody>
           <a:bodyPr wrap="none" lIns="0" rIns="0" tIns="0" bIns="0">
-            <a:spAutoFit/>
+            <a:noAutofit/>
           </a:bodyPr>
           <a:lstStyle/>
           <a:p>
@@ -13539,7 +13539,7 @@
                 </a:solidFill>
                 <a:latin typeface="Calibri"/>
               </a:rPr>
-              <a:t>1  Observe — complete feature table</a:t>
+              <a:t>1  Research — record data &amp; sources</a:t>
             </a:r>
           </a:p>
         </p:txBody>
@@ -13562,7 +13562,7 @@
         </p:spPr>
         <p:txBody>
           <a:bodyPr wrap="none" lIns="0" rIns="0" tIns="0" bIns="0">
-            <a:spAutoFit/>
+            <a:noAutofit/>
           </a:bodyPr>
           <a:lstStyle/>
           <a:p>
@@ -13573,7 +13573,7 @@
                 </a:solidFill>
                 <a:latin typeface="Calibri"/>
               </a:rPr>
-              <a:t>2  Sketch — label magnification &amp; specimen</a:t>
+              <a:t>2  Answer — short-answer questions</a:t>
             </a:r>
           </a:p>
         </p:txBody>
@@ -13596,7 +13596,7 @@
         </p:spPr>
         <p:txBody>
           <a:bodyPr wrap="none" lIns="0" rIns="0" tIns="0" bIns="0">
-            <a:spAutoFit/>
+            <a:noAutofit/>
           </a:bodyPr>
           <a:lstStyle/>
           <a:p>
@@ -13607,7 +13607,7 @@
                 </a:solidFill>
                 <a:latin typeface="Calibri"/>
               </a:rPr>
-              <a:t>3  Answer — 4 short questions</a:t>
+              <a:t>3  Apply — critical-thinking &amp; equations</a:t>
             </a:r>
           </a:p>
         </p:txBody>
@@ -13630,7 +13630,7 @@
         </p:spPr>
         <p:txBody>
           <a:bodyPr wrap="none" lIns="0" rIns="0" tIns="0" bIns="0">
-            <a:spAutoFit/>
+            <a:noAutofit/>
           </a:bodyPr>
           <a:lstStyle/>
           <a:p>
@@ -13641,7 +13641,7 @@
                 </a:solidFill>
                 <a:latin typeface="Calibri"/>
               </a:rPr>
-              <a:t>Specimens to Check Out</a:t>
+              <a:t>Alloys of Record</a:t>
             </a:r>
           </a:p>
         </p:txBody>
@@ -13664,7 +13664,7 @@
         </p:spPr>
         <p:txBody>
           <a:bodyPr wrap="none" lIns="0" rIns="0" tIns="0" bIns="0">
-            <a:spAutoFit/>
+            <a:noAutofit/>
           </a:bodyPr>
           <a:lstStyle/>
           <a:p>
@@ -13675,7 +13675,7 @@
                 </a:solidFill>
                 <a:latin typeface="Calibri"/>
               </a:rPr>
-              <a:t>· Specimen G — 6061-T6 aluminum</a:t>
+              <a:t>· Alloy G — 6061-T6 aluminum</a:t>
             </a:r>
           </a:p>
         </p:txBody>
@@ -13698,7 +13698,7 @@
         </p:spPr>
         <p:txBody>
           <a:bodyPr wrap="none" lIns="0" rIns="0" tIns="0" bIns="0">
-            <a:spAutoFit/>
+            <a:noAutofit/>
           </a:bodyPr>
           <a:lstStyle/>
           <a:p>
@@ -13709,7 +13709,7 @@
                 </a:solidFill>
                 <a:latin typeface="Calibri"/>
               </a:rPr>
-              <a:t>· Specimen K — 70/30 brass</a:t>
+              <a:t>· Alloy K — 70/30 brass</a:t>
             </a:r>
           </a:p>
         </p:txBody>
@@ -13732,7 +13732,7 @@
         </p:spPr>
         <p:txBody>
           <a:bodyPr wrap="none" lIns="0" rIns="0" tIns="0" bIns="0">
-            <a:spAutoFit/>
+            <a:noAutofit/>
           </a:bodyPr>
           <a:lstStyle/>
           <a:p>
@@ -13743,7 +13743,7 @@
                 </a:solidFill>
                 <a:latin typeface="Calibri"/>
               </a:rPr>
-              <a:t>How to check out the kit:</a:t>
+              <a:t>How to Complete This Module:</a:t>
             </a:r>
           </a:p>
         </p:txBody>
@@ -13766,7 +13766,7 @@
         </p:spPr>
         <p:txBody>
           <a:bodyPr wrap="none" lIns="0" rIns="0" tIns="0" bIns="0">
-            <a:spAutoFit/>
+            <a:noAutofit/>
           </a:bodyPr>
           <a:lstStyle/>
           <a:p>
@@ -13777,7 +13777,7 @@
                 </a:solidFill>
                 <a:latin typeface="Calibri"/>
               </a:rPr>
-              <a:t>1  See instructor after class today</a:t>
+              <a:t>1  Research the alloy(s) using credible sources</a:t>
             </a:r>
           </a:p>
         </p:txBody>
@@ -13800,7 +13800,7 @@
         </p:spPr>
         <p:txBody>
           <a:bodyPr wrap="none" lIns="0" rIns="0" tIns="0" bIns="0">
-            <a:spAutoFit/>
+            <a:noAutofit/>
           </a:bodyPr>
           <a:lstStyle/>
           <a:p>
@@ -13811,7 +13811,7 @@
                 </a:solidFill>
                 <a:latin typeface="Calibri"/>
               </a:rPr>
-              <a:t>2  Sign out the specimen tray</a:t>
+              <a:t>2  Record data with a source citation</a:t>
             </a:r>
           </a:p>
         </p:txBody>
@@ -13834,7 +13834,7 @@
         </p:spPr>
         <p:txBody>
           <a:bodyPr wrap="none" lIns="0" rIns="0" tIns="0" bIns="0">
-            <a:spAutoFit/>
+            <a:noAutofit/>
           </a:bodyPr>
           <a:lstStyle/>
           <a:p>
@@ -13845,7 +13845,7 @@
                 </a:solidFill>
                 <a:latin typeface="Calibri"/>
               </a:rPr>
-              <a:t>3  Use the EXAMET-5 at your convenience</a:t>
+              <a:t>3  Answer the short-answer questions</a:t>
             </a:r>
           </a:p>
         </p:txBody>
@@ -13868,7 +13868,7 @@
         </p:spPr>
         <p:txBody>
           <a:bodyPr wrap="none" lIns="0" rIns="0" tIns="0" bIns="0">
-            <a:spAutoFit/>
+            <a:noAutofit/>
           </a:bodyPr>
           <a:lstStyle/>
           <a:p>
@@ -13879,7 +13879,7 @@
                 </a:solidFill>
                 <a:latin typeface="Calibri"/>
               </a:rPr>
-              <a:t>4  Return kit before leaving class</a:t>
+              <a:t>4  Answer the critical-thinking questions</a:t>
             </a:r>
           </a:p>
         </p:txBody>
@@ -13902,7 +13902,7 @@
         </p:spPr>
         <p:txBody>
           <a:bodyPr wrap="none" lIns="0" rIns="0" tIns="0" bIns="0">
-            <a:spAutoFit/>
+            <a:noAutofit/>
           </a:bodyPr>
           <a:lstStyle/>
           <a:p>
@@ -13913,7 +13913,7 @@
                 </a:solidFill>
                 <a:latin typeface="Calibri"/>
               </a:rPr>
-              <a:t>5  Submit completed module with your portfolio</a:t>
+              <a:t>5  Keep the module with your portfolio</a:t>
             </a:r>
           </a:p>
         </p:txBody>
